--- a/system-design-101/vi/lessons/sd-04-037/slides/sd-04-037.pptx
+++ b/system-design-101/vi/lessons/sd-04-037/slides/sd-04-037.pptx
@@ -1790,7 +1790,7 @@
         <p:spPr>
           <a:xfrm>
             <a:off x="914400" y="1428750"/>
-            <a:ext cx="8953500" cy="2476500"/>
+            <a:ext cx="8953500" cy="2286000"/>
           </a:xfrm>
           <a:prstGeom prst="rect">
             <a:avLst/>
@@ -1799,17 +1799,17 @@
           <a:ln/>
         </p:spPr>
         <p:txBody>
-          <a:bodyPr wrap="square" lIns="0" tIns="61722" rIns="0" bIns="-61722" rtlCol="0" anchor="t"/>
+          <a:bodyPr wrap="square" lIns="0" tIns="69437" rIns="0" bIns="-69437" rtlCol="0" anchor="t"/>
           <a:lstStyle/>
           <a:p>
             <a:pPr algn="l" indent="0" marL="0">
               <a:lnSpc>
-                <a:spcPts val="7560"/>
+                <a:spcPts val="8505"/>
               </a:lnSpc>
               <a:buNone/>
             </a:pPr>
             <a:r>
-              <a:rPr lang="en-US" sz="7200" dirty="0" spc="-55" kern="0">
+              <a:rPr lang="en-US" sz="8100" dirty="0" spc="-63" kern="0">
                 <a:solidFill>
                   <a:srgbClr val="F3EEE3"/>
                 </a:solidFill>
@@ -1820,7 +1820,7 @@
               <a:t>Từ</a:t>
             </a:r>
             <a:r>
-              <a:rPr lang="en-US" sz="7200" dirty="0" spc="0" kern="0">
+              <a:rPr lang="en-US" sz="8100" dirty="0" spc="1" kern="0">
                 <a:solidFill>
                   <a:srgbClr val="F3EEE3"/>
                 </a:solidFill>
@@ -1831,7 +1831,7 @@
               <a:t> hàng</a:t>
             </a:r>
             <a:r>
-              <a:rPr lang="en-US" sz="7200" dirty="0" spc="-21" kern="0">
+              <a:rPr lang="en-US" sz="8100" dirty="0" spc="-26" kern="0">
                 <a:solidFill>
                   <a:srgbClr val="F3EEE3"/>
                 </a:solidFill>
@@ -1842,7 +1842,7 @@
               <a:t> đợi</a:t>
             </a:r>
             <a:r>
-              <a:rPr lang="en-US" sz="7200" dirty="0" spc="-69" kern="0">
+              <a:rPr lang="en-US" sz="8100" dirty="0" spc="-76" kern="0">
                 <a:solidFill>
                   <a:srgbClr val="F3EEE3"/>
                 </a:solidFill>
@@ -1853,7 +1853,7 @@
               <a:t> tới</a:t>
             </a:r>
             <a:r>
-              <a:rPr lang="en-US" sz="7200" dirty="0" spc="-2" kern="0">
+              <a:rPr lang="en-US" sz="8100" dirty="0" spc="1" kern="0">
                 <a:solidFill>
                   <a:srgbClr val="F3EEE3"/>
                 </a:solidFill>
@@ -1864,7 +1864,7 @@
               <a:t> nhật</a:t>
             </a:r>
             <a:r>
-              <a:rPr lang="en-US" sz="7200" dirty="0" spc="-1" kern="0">
+              <a:rPr lang="en-US" sz="8100" dirty="0" spc="-3" kern="0">
                 <a:solidFill>
                   <a:srgbClr val="F3EEE3"/>
                 </a:solidFill>
@@ -1874,7 +1874,7 @@
               </a:rPr>
               <a:t> ký</a:t>
             </a:r>
-            <a:endParaRPr lang="en-US" sz="7200" dirty="0"/>
+            <a:endParaRPr lang="en-US" sz="8100" dirty="0"/>
           </a:p>
         </p:txBody>
       </p:sp>
@@ -5919,7 +5919,7 @@
               <a:buNone/>
             </a:pPr>
             <a:r>
-              <a:rPr lang="en-US" sz="6600" dirty="0" spc="-1" kern="0">
+              <a:rPr lang="en-US" sz="6900" dirty="0" spc="-1" kern="0">
                 <a:solidFill>
                   <a:srgbClr val="14161C"/>
                 </a:solidFill>
@@ -5930,7 +5930,7 @@
               <a:t>Hàng</a:t>
             </a:r>
             <a:r>
-              <a:rPr lang="en-US" sz="6600" dirty="0" spc="-19" kern="0">
+              <a:rPr lang="en-US" sz="6900" dirty="0" spc="-20" kern="0">
                 <a:solidFill>
                   <a:srgbClr val="14161C"/>
                 </a:solidFill>
@@ -5941,7 +5941,7 @@
               <a:t> đợi</a:t>
             </a:r>
             <a:r>
-              <a:rPr lang="en-US" sz="6600" dirty="0" spc="10" kern="0">
+              <a:rPr lang="en-US" sz="6900" dirty="0" spc="12" kern="0">
                 <a:solidFill>
                   <a:srgbClr val="14161C"/>
                 </a:solidFill>
@@ -5952,7 +5952,7 @@
               <a:t> đúng</a:t>
             </a:r>
             <a:r>
-              <a:rPr lang="en-US" sz="6600" dirty="0" spc="0" kern="0">
+              <a:rPr lang="en-US" sz="6900" dirty="0" spc="3" kern="0">
                 <a:solidFill>
                   <a:srgbClr val="14161C"/>
                 </a:solidFill>
@@ -5963,7 +5963,7 @@
               <a:t> nghĩa:</a:t>
             </a:r>
             <a:r>
-              <a:rPr lang="en-US" sz="6600" dirty="0" spc="32" kern="0">
+              <a:rPr lang="en-US" sz="6900" dirty="0" spc="34" kern="0">
                 <a:solidFill>
                   <a:srgbClr val="14161C"/>
                 </a:solidFill>
@@ -5974,7 +5974,7 @@
               <a:t> gửi</a:t>
             </a:r>
             <a:r>
-              <a:rPr lang="en-US" sz="6600" dirty="0" spc="-62" kern="0">
+              <a:rPr lang="en-US" sz="6900" dirty="0" spc="-68" kern="0">
                 <a:solidFill>
                   <a:srgbClr val="14161C"/>
                 </a:solidFill>
@@ -5985,7 +5985,7 @@
               <a:t> vào,</a:t>
             </a:r>
             <a:r>
-              <a:rPr lang="en-US" sz="6600" dirty="0" spc="-3" kern="0">
+              <a:rPr lang="en-US" sz="6900" dirty="0" spc="-2" kern="0">
                 <a:solidFill>
                   <a:srgbClr val="14161C"/>
                 </a:solidFill>
@@ -5996,7 +5996,7 @@
               <a:t> lấy</a:t>
             </a:r>
             <a:r>
-              <a:rPr lang="en-US" sz="6600" dirty="0" spc="-38" kern="0">
+              <a:rPr lang="en-US" sz="6900" dirty="0" spc="-40" kern="0">
                 <a:solidFill>
                   <a:srgbClr val="14161C"/>
                 </a:solidFill>
@@ -6006,7 +6006,7 @@
               </a:rPr>
               <a:t> ra</a:t>
             </a:r>
-            <a:endParaRPr lang="en-US" sz="6600" dirty="0"/>
+            <a:endParaRPr lang="en-US" sz="6900" dirty="0"/>
           </a:p>
         </p:txBody>
       </p:sp>
@@ -7672,7 +7672,7 @@
               <a:buNone/>
             </a:pPr>
             <a:r>
-              <a:rPr lang="en-US" sz="6300" dirty="0" spc="-71" kern="0">
+              <a:rPr lang="en-US" sz="6900" dirty="0" spc="1" kern="0">
                 <a:solidFill>
                   <a:srgbClr val="F3EEE3"/>
                 </a:solidFill>
@@ -7680,10 +7680,10 @@
                 <a:ea typeface="Bricolage Grotesque ExtraBold" pitchFamily="34" charset="-122"/>
                 <a:cs typeface="Bricolage Grotesque ExtraBold" pitchFamily="34" charset="-120"/>
               </a:rPr>
-              <a:t>Người</a:t>
-            </a:r>
-            <a:r>
-              <a:rPr lang="en-US" sz="6300" dirty="0" spc="33" kern="0">
+              <a:t>Không</a:t>
+            </a:r>
+            <a:r>
+              <a:rPr lang="en-US" sz="6900" dirty="0" spc="34" kern="0">
                 <a:solidFill>
                   <a:srgbClr val="F3EEE3"/>
                 </a:solidFill>
@@ -7694,7 +7694,7 @@
               <a:t> gửi</a:t>
             </a:r>
             <a:r>
-              <a:rPr lang="en-US" sz="6300" dirty="0" spc="0" kern="0">
+              <a:rPr lang="en-US" sz="6900" dirty="0" spc="2" kern="0">
                 <a:solidFill>
                   <a:srgbClr val="F3EEE3"/>
                 </a:solidFill>
@@ -7702,10 +7702,10 @@
                 <a:ea typeface="Bricolage Grotesque ExtraBold" pitchFamily="34" charset="-122"/>
                 <a:cs typeface="Bricolage Grotesque ExtraBold" pitchFamily="34" charset="-120"/>
               </a:rPr>
-              <a:t> không</a:t>
-            </a:r>
-            <a:r>
-              <a:rPr lang="en-US" sz="6300" dirty="0" spc="32" kern="0">
+              <a:t> thẳng</a:t>
+            </a:r>
+            <a:r>
+              <a:rPr lang="en-US" sz="6900" dirty="0" spc="-57" kern="0">
                 <a:solidFill>
                   <a:srgbClr val="F3EEE3"/>
                 </a:solidFill>
@@ -7713,10 +7713,10 @@
                 <a:ea typeface="Bricolage Grotesque ExtraBold" pitchFamily="34" charset="-122"/>
                 <a:cs typeface="Bricolage Grotesque ExtraBold" pitchFamily="34" charset="-120"/>
               </a:rPr>
-              <a:t> gửi</a:t>
-            </a:r>
-            <a:r>
-              <a:rPr lang="en-US" sz="6300" dirty="0" spc="2" kern="0">
+              <a:t> vào</a:t>
+            </a:r>
+            <a:r>
+              <a:rPr lang="en-US" sz="6900" dirty="0" spc="2" kern="0">
                 <a:solidFill>
                   <a:srgbClr val="F3EEE3"/>
                 </a:solidFill>
@@ -7724,10 +7724,10 @@
                 <a:ea typeface="Bricolage Grotesque ExtraBold" pitchFamily="34" charset="-122"/>
                 <a:cs typeface="Bricolage Grotesque ExtraBold" pitchFamily="34" charset="-120"/>
               </a:rPr>
-              <a:t> thẳng</a:t>
-            </a:r>
-            <a:r>
-              <a:rPr lang="en-US" sz="6300" dirty="0" spc="-50" kern="0">
+              <a:t> hàng</a:t>
+            </a:r>
+            <a:r>
+              <a:rPr lang="en-US" sz="6900" dirty="0" spc="-20" kern="0">
                 <a:solidFill>
                   <a:srgbClr val="F3EEE3"/>
                 </a:solidFill>
@@ -7735,31 +7735,9 @@
                 <a:ea typeface="Bricolage Grotesque ExtraBold" pitchFamily="34" charset="-122"/>
                 <a:cs typeface="Bricolage Grotesque ExtraBold" pitchFamily="34" charset="-120"/>
               </a:rPr>
-              <a:t> vào</a:t>
-            </a:r>
-            <a:r>
-              <a:rPr lang="en-US" sz="6300" dirty="0" spc="2" kern="0">
-                <a:solidFill>
-                  <a:srgbClr val="F3EEE3"/>
-                </a:solidFill>
-                <a:latin typeface="Bricolage Grotesque ExtraBold" pitchFamily="34" charset="0"/>
-                <a:ea typeface="Bricolage Grotesque ExtraBold" pitchFamily="34" charset="-122"/>
-                <a:cs typeface="Bricolage Grotesque ExtraBold" pitchFamily="34" charset="-120"/>
-              </a:rPr>
-              <a:t> hàng</a:t>
-            </a:r>
-            <a:r>
-              <a:rPr lang="en-US" sz="6300" dirty="0" spc="-15" kern="0">
-                <a:solidFill>
-                  <a:srgbClr val="F3EEE3"/>
-                </a:solidFill>
-                <a:latin typeface="Bricolage Grotesque ExtraBold" pitchFamily="34" charset="0"/>
-                <a:ea typeface="Bricolage Grotesque ExtraBold" pitchFamily="34" charset="-122"/>
-                <a:cs typeface="Bricolage Grotesque ExtraBold" pitchFamily="34" charset="-120"/>
-              </a:rPr>
               <a:t> đợi</a:t>
             </a:r>
-            <a:endParaRPr lang="en-US" sz="6300" dirty="0"/>
+            <a:endParaRPr lang="en-US" sz="6900" dirty="0"/>
           </a:p>
         </p:txBody>
       </p:sp>
@@ -9210,17 +9188,17 @@
           <a:ln/>
         </p:spPr>
         <p:txBody>
-          <a:bodyPr wrap="square" lIns="0" tIns="77153" rIns="0" bIns="-77153" rtlCol="0" anchor="t"/>
+          <a:bodyPr wrap="square" lIns="0" tIns="72009" rIns="0" bIns="-72009" rtlCol="0" anchor="t"/>
           <a:lstStyle/>
           <a:p>
             <a:pPr algn="l" indent="0" marL="0">
               <a:lnSpc>
-                <a:spcPts val="9450"/>
+                <a:spcPts val="8820"/>
               </a:lnSpc>
               <a:buNone/>
             </a:pPr>
             <a:r>
-              <a:rPr lang="en-US" sz="9000" dirty="0" spc="0" kern="0">
+              <a:rPr lang="en-US" sz="8400" dirty="0" spc="-2" kern="0">
                 <a:solidFill>
                   <a:srgbClr val="14161C"/>
                 </a:solidFill>
@@ -9231,7 +9209,7 @@
               <a:t>Sự</a:t>
             </a:r>
             <a:r>
-              <a:rPr lang="en-US" sz="9000" dirty="0" spc="2" kern="0">
+              <a:rPr lang="en-US" sz="8400" dirty="0" spc="3" kern="0">
                 <a:solidFill>
                   <a:srgbClr val="14161C"/>
                 </a:solidFill>
@@ -9242,7 +9220,7 @@
               <a:t> kiện</a:t>
             </a:r>
             <a:r>
-              <a:rPr lang="en-US" sz="9000" dirty="0" spc="-1" kern="0">
+              <a:rPr lang="en-US" sz="8400" dirty="0" spc="-2" kern="0">
                 <a:solidFill>
                   <a:srgbClr val="14161C"/>
                 </a:solidFill>
@@ -9253,7 +9231,7 @@
               <a:t> không</a:t>
             </a:r>
             <a:r>
-              <a:rPr lang="en-US" sz="9000" dirty="0" spc="1" kern="0">
+              <a:rPr lang="en-US" sz="8400" dirty="0" spc="4" kern="0">
                 <a:solidFill>
                   <a:srgbClr val="14161C"/>
                 </a:solidFill>
@@ -9264,7 +9242,7 @@
               <a:t> bị</a:t>
             </a:r>
             <a:r>
-              <a:rPr lang="en-US" sz="9000" dirty="0" spc="-122" kern="0">
+              <a:rPr lang="en-US" sz="8400" dirty="0" spc="-115" kern="0">
                 <a:solidFill>
                   <a:srgbClr val="14161C"/>
                 </a:solidFill>
@@ -9275,7 +9253,7 @@
               <a:t> xóa</a:t>
             </a:r>
             <a:r>
-              <a:rPr lang="en-US" sz="9000" dirty="0" spc="1" kern="0">
+              <a:rPr lang="en-US" sz="8400" dirty="0" spc="3" kern="0">
                 <a:solidFill>
                   <a:srgbClr val="14161C"/>
                 </a:solidFill>
@@ -9286,7 +9264,7 @@
               <a:t> sau</a:t>
             </a:r>
             <a:r>
-              <a:rPr lang="en-US" sz="9000" dirty="0" spc="-1" kern="0">
+              <a:rPr lang="en-US" sz="8400" dirty="0" spc="0" kern="0">
                 <a:solidFill>
                   <a:srgbClr val="14161C"/>
                 </a:solidFill>
@@ -9297,7 +9275,7 @@
               <a:t> khi</a:t>
             </a:r>
             <a:r>
-              <a:rPr lang="en-US" sz="9000" dirty="0" spc="20" kern="0">
+              <a:rPr lang="en-US" sz="8400" dirty="0" spc="18" kern="0">
                 <a:solidFill>
                   <a:srgbClr val="14161C"/>
                 </a:solidFill>
@@ -9307,7 +9285,7 @@
               </a:rPr>
               <a:t> đọc</a:t>
             </a:r>
-            <a:endParaRPr lang="en-US" sz="9000" dirty="0"/>
+            <a:endParaRPr lang="en-US" sz="8400" dirty="0"/>
           </a:p>
         </p:txBody>
       </p:sp>
@@ -10378,7 +10356,7 @@
               <a:buNone/>
             </a:pPr>
             <a:r>
-              <a:rPr lang="en-US" sz="6300" dirty="0" spc="-1" kern="0">
+              <a:rPr lang="en-US" sz="6900" dirty="0" spc="-2" kern="0">
                 <a:solidFill>
                   <a:srgbClr val="14161C"/>
                 </a:solidFill>
@@ -10389,7 +10367,7 @@
               <a:t>Hai</a:t>
             </a:r>
             <a:r>
-              <a:rPr lang="en-US" sz="6300" dirty="0" spc="17" kern="0">
+              <a:rPr lang="en-US" sz="6900" dirty="0" spc="17" kern="0">
                 <a:solidFill>
                   <a:srgbClr val="14161C"/>
                 </a:solidFill>
@@ -10400,7 +10378,7 @@
               <a:t> tầng,</a:t>
             </a:r>
             <a:r>
-              <a:rPr lang="en-US" sz="6300" dirty="0" spc="4" kern="0">
+              <a:rPr lang="en-US" sz="6900" dirty="0" spc="1" kern="0">
                 <a:solidFill>
                   <a:srgbClr val="14161C"/>
                 </a:solidFill>
@@ -10411,7 +10389,7 @@
               <a:t> nhớ</a:t>
             </a:r>
             <a:r>
-              <a:rPr lang="en-US" sz="6300" dirty="0" spc="1" kern="0">
+              <a:rPr lang="en-US" sz="6900" dirty="0" spc="-1" kern="0">
                 <a:solidFill>
                   <a:srgbClr val="14161C"/>
                 </a:solidFill>
@@ -10419,10 +10397,10 @@
                 <a:ea typeface="Bricolage Grotesque ExtraBold" pitchFamily="34" charset="-122"/>
                 <a:cs typeface="Bricolage Grotesque ExtraBold" pitchFamily="34" charset="-120"/>
               </a:rPr>
-              <a:t> vị trí</a:t>
-            </a:r>
-            <a:r>
-              <a:rPr lang="en-US" sz="6300" dirty="0" spc="11" kern="0">
+              <a:t> vị</a:t>
+            </a:r>
+            <a:r>
+              <a:rPr lang="en-US" sz="6900" dirty="0" spc="1" kern="0">
                 <a:solidFill>
                   <a:srgbClr val="14161C"/>
                 </a:solidFill>
@@ -10430,10 +10408,10 @@
                 <a:ea typeface="Bricolage Grotesque ExtraBold" pitchFamily="34" charset="-122"/>
                 <a:cs typeface="Bricolage Grotesque ExtraBold" pitchFamily="34" charset="-120"/>
               </a:rPr>
-              <a:t> từng</a:t>
-            </a:r>
-            <a:r>
-              <a:rPr lang="en-US" sz="6300" dirty="0" spc="-58" kern="0">
+              <a:t> trí</a:t>
+            </a:r>
+            <a:r>
+              <a:rPr lang="en-US" sz="6900" dirty="0" spc="8" kern="0">
                 <a:solidFill>
                   <a:srgbClr val="14161C"/>
                 </a:solidFill>
@@ -10441,10 +10419,10 @@
                 <a:ea typeface="Bricolage Grotesque ExtraBold" pitchFamily="34" charset="-122"/>
                 <a:cs typeface="Bricolage Grotesque ExtraBold" pitchFamily="34" charset="-120"/>
               </a:rPr>
-              <a:t> người</a:t>
-            </a:r>
-            <a:r>
-              <a:rPr lang="en-US" sz="6300" dirty="0" spc="2" kern="0">
+              <a:t> từng</a:t>
+            </a:r>
+            <a:r>
+              <a:rPr lang="en-US" sz="6900" dirty="0" spc="-65" kern="0">
                 <a:solidFill>
                   <a:srgbClr val="14161C"/>
                 </a:solidFill>
@@ -10452,9 +10430,20 @@
                 <a:ea typeface="Bricolage Grotesque ExtraBold" pitchFamily="34" charset="-122"/>
                 <a:cs typeface="Bricolage Grotesque ExtraBold" pitchFamily="34" charset="-120"/>
               </a:rPr>
+              <a:t> người</a:t>
+            </a:r>
+            <a:r>
+              <a:rPr lang="en-US" sz="6900" dirty="0" spc="1" kern="0">
+                <a:solidFill>
+                  <a:srgbClr val="14161C"/>
+                </a:solidFill>
+                <a:latin typeface="Bricolage Grotesque ExtraBold" pitchFamily="34" charset="0"/>
+                <a:ea typeface="Bricolage Grotesque ExtraBold" pitchFamily="34" charset="-122"/>
+                <a:cs typeface="Bricolage Grotesque ExtraBold" pitchFamily="34" charset="-120"/>
+              </a:rPr>
               <a:t> nhận</a:t>
             </a:r>
-            <a:endParaRPr lang="en-US" sz="6300" dirty="0"/>
+            <a:endParaRPr lang="en-US" sz="6900" dirty="0"/>
           </a:p>
         </p:txBody>
       </p:sp>
@@ -11949,7 +11938,7 @@
               <a:buNone/>
             </a:pPr>
             <a:r>
-              <a:rPr lang="en-US" sz="6300" dirty="0" spc="-2" kern="0">
+              <a:rPr lang="en-US" sz="6900" dirty="0" spc="2" kern="0">
                 <a:solidFill>
                   <a:srgbClr val="F3EEE3"/>
                 </a:solidFill>
@@ -11960,7 +11949,7 @@
               <a:t>Câu</a:t>
             </a:r>
             <a:r>
-              <a:rPr lang="en-US" sz="6300" dirty="0" spc="1" kern="0">
+              <a:rPr lang="en-US" sz="6900" dirty="0" spc="1" kern="0">
                 <a:solidFill>
                   <a:srgbClr val="F3EEE3"/>
                 </a:solidFill>
@@ -11971,7 +11960,7 @@
               <a:t> hỏi</a:t>
             </a:r>
             <a:r>
-              <a:rPr lang="en-US" sz="6300" dirty="0" spc="12" kern="0">
+              <a:rPr lang="en-US" sz="6900" dirty="0" spc="14" kern="0">
                 <a:solidFill>
                   <a:srgbClr val="F3EEE3"/>
                 </a:solidFill>
@@ -11982,7 +11971,7 @@
               <a:t> đúng:</a:t>
             </a:r>
             <a:r>
-              <a:rPr lang="en-US" sz="6300" dirty="0" spc="3" kern="0">
+              <a:rPr lang="en-US" sz="6900" dirty="0" spc="-3" kern="0">
                 <a:solidFill>
                   <a:srgbClr val="F3EEE3"/>
                 </a:solidFill>
@@ -11990,10 +11979,10 @@
                 <a:ea typeface="Bricolage Grotesque ExtraBold" pitchFamily="34" charset="-122"/>
                 <a:cs typeface="Bricolage Grotesque ExtraBold" pitchFamily="34" charset="-120"/>
               </a:rPr>
-              <a:t> tin</a:t>
-            </a:r>
-            <a:r>
-              <a:rPr lang="en-US" sz="6300" dirty="0" spc="-2" kern="0">
+              <a:t> có</a:t>
+            </a:r>
+            <a:r>
+              <a:rPr lang="en-US" sz="6900" dirty="0" spc="-1" kern="0">
                 <a:solidFill>
                   <a:srgbClr val="F3EEE3"/>
                 </a:solidFill>
@@ -12001,10 +11990,10 @@
                 <a:ea typeface="Bricolage Grotesque ExtraBold" pitchFamily="34" charset="-122"/>
                 <a:cs typeface="Bricolage Grotesque ExtraBold" pitchFamily="34" charset="-120"/>
               </a:rPr>
-              <a:t> có</a:t>
-            </a:r>
-            <a:r>
-              <a:rPr lang="en-US" sz="6300" dirty="0" spc="0" kern="0">
+              <a:t> cần</a:t>
+            </a:r>
+            <a:r>
+              <a:rPr lang="en-US" sz="6900" dirty="0" spc="11" kern="0">
                 <a:solidFill>
                   <a:srgbClr val="F3EEE3"/>
                 </a:solidFill>
@@ -12012,10 +12001,10 @@
                 <a:ea typeface="Bricolage Grotesque ExtraBold" pitchFamily="34" charset="-122"/>
                 <a:cs typeface="Bricolage Grotesque ExtraBold" pitchFamily="34" charset="-120"/>
               </a:rPr>
-              <a:t> cần</a:t>
-            </a:r>
-            <a:r>
-              <a:rPr lang="en-US" sz="6300" dirty="0" spc="13" kern="0">
+              <a:t> đọc</a:t>
+            </a:r>
+            <a:r>
+              <a:rPr lang="en-US" sz="6900" dirty="0" spc="10" kern="0">
                 <a:solidFill>
                   <a:srgbClr val="F3EEE3"/>
                 </a:solidFill>
@@ -12023,20 +12012,9 @@
                 <a:ea typeface="Bricolage Grotesque ExtraBold" pitchFamily="34" charset="-122"/>
                 <a:cs typeface="Bricolage Grotesque ExtraBold" pitchFamily="34" charset="-120"/>
               </a:rPr>
-              <a:t> đọc</a:t>
-            </a:r>
-            <a:r>
-              <a:rPr lang="en-US" sz="6300" dirty="0" spc="-1" kern="0">
-                <a:solidFill>
-                  <a:srgbClr val="F3EEE3"/>
-                </a:solidFill>
-                <a:latin typeface="Bricolage Grotesque ExtraBold" pitchFamily="34" charset="0"/>
-                <a:ea typeface="Bricolage Grotesque ExtraBold" pitchFamily="34" charset="-122"/>
-                <a:cs typeface="Bricolage Grotesque ExtraBold" pitchFamily="34" charset="-120"/>
-              </a:rPr>
-              <a:t> lại không?</a:t>
-            </a:r>
-            <a:endParaRPr lang="en-US" sz="6300" dirty="0"/>
+              <a:t> lại?</a:t>
+            </a:r>
+            <a:endParaRPr lang="en-US" sz="6900" dirty="0"/>
           </a:p>
         </p:txBody>
       </p:sp>
@@ -13449,7 +13427,7 @@
               <a:buNone/>
             </a:pPr>
             <a:r>
-              <a:rPr lang="en-US" sz="5700" dirty="0" spc="5" kern="0">
+              <a:rPr lang="en-US" sz="6900" dirty="0" spc="3" kern="0">
                 <a:solidFill>
                   <a:srgbClr val="14161C"/>
                 </a:solidFill>
@@ -13457,10 +13435,10 @@
                 <a:ea typeface="Bricolage Grotesque ExtraBold" pitchFamily="34" charset="-122"/>
                 <a:cs typeface="Bricolage Grotesque ExtraBold" pitchFamily="34" charset="-120"/>
               </a:rPr>
-              <a:t>Thêm</a:t>
-            </a:r>
-            <a:r>
-              <a:rPr lang="en-US" sz="5700" dirty="0" spc="-3" kern="0">
+              <a:t>Dịch</a:t>
+            </a:r>
+            <a:r>
+              <a:rPr lang="en-US" sz="6900" dirty="0" spc="0" kern="0">
                 <a:solidFill>
                   <a:srgbClr val="14161C"/>
                 </a:solidFill>
@@ -13468,10 +13446,10 @@
                 <a:ea typeface="Bricolage Grotesque ExtraBold" pitchFamily="34" charset="-122"/>
                 <a:cs typeface="Bricolage Grotesque ExtraBold" pitchFamily="34" charset="-120"/>
               </a:rPr>
-              <a:t> dịch vụ</a:t>
-            </a:r>
-            <a:r>
-              <a:rPr lang="en-US" sz="5700" dirty="0" spc="0" kern="0">
+              <a:t> vụ</a:t>
+            </a:r>
+            <a:r>
+              <a:rPr lang="en-US" sz="6900" dirty="0" spc="1" kern="0">
                 <a:solidFill>
                   <a:srgbClr val="14161C"/>
                 </a:solidFill>
@@ -13482,7 +13460,7 @@
               <a:t> thống</a:t>
             </a:r>
             <a:r>
-              <a:rPr lang="en-US" sz="5700" dirty="0" spc="-48" kern="0">
+              <a:rPr lang="en-US" sz="6900" dirty="0" spc="-52" kern="0">
                 <a:solidFill>
                   <a:srgbClr val="14161C"/>
                 </a:solidFill>
@@ -13493,7 +13471,7 @@
               <a:t> kê</a:t>
             </a:r>
             <a:r>
-              <a:rPr lang="en-US" sz="5700" dirty="0" spc="-2" kern="0">
+              <a:rPr lang="en-US" sz="6900" dirty="0" spc="-1" kern="0">
                 <a:solidFill>
                   <a:srgbClr val="14161C"/>
                 </a:solidFill>
@@ -13504,7 +13482,7 @@
               <a:t> cần</a:t>
             </a:r>
             <a:r>
-              <a:rPr lang="en-US" sz="5700" dirty="0" spc="-25" kern="0">
+              <a:rPr lang="en-US" sz="6900" dirty="0" spc="-30" kern="0">
                 <a:solidFill>
                   <a:srgbClr val="14161C"/>
                 </a:solidFill>
@@ -13515,7 +13493,7 @@
               <a:t> đơn</a:t>
             </a:r>
             <a:r>
-              <a:rPr lang="en-US" sz="5700" dirty="0" spc="-9" kern="0">
+              <a:rPr lang="en-US" sz="6900" dirty="0" spc="-6" kern="0">
                 <a:solidFill>
                   <a:srgbClr val="14161C"/>
                 </a:solidFill>
@@ -13526,7 +13504,7 @@
               <a:t> ba</a:t>
             </a:r>
             <a:r>
-              <a:rPr lang="en-US" sz="5700" dirty="0" spc="1" kern="0">
+              <a:rPr lang="en-US" sz="6900" dirty="0" spc="1" kern="0">
                 <a:solidFill>
                   <a:srgbClr val="14161C"/>
                 </a:solidFill>
@@ -13534,20 +13512,9 @@
                 <a:ea typeface="Bricolage Grotesque ExtraBold" pitchFamily="34" charset="-122"/>
                 <a:cs typeface="Bricolage Grotesque ExtraBold" pitchFamily="34" charset="-120"/>
               </a:rPr>
-              <a:t> tháng</a:t>
-            </a:r>
-            <a:r>
-              <a:rPr lang="en-US" sz="5700" dirty="0" spc="-24" kern="0">
-                <a:solidFill>
-                  <a:srgbClr val="14161C"/>
-                </a:solidFill>
-                <a:latin typeface="Bricolage Grotesque ExtraBold" pitchFamily="34" charset="0"/>
-                <a:ea typeface="Bricolage Grotesque ExtraBold" pitchFamily="34" charset="-122"/>
-                <a:cs typeface="Bricolage Grotesque ExtraBold" pitchFamily="34" charset="-120"/>
-              </a:rPr>
-              <a:t> qua?</a:t>
-            </a:r>
-            <a:endParaRPr lang="en-US" sz="5700" dirty="0"/>
+              <a:t> tháng?</a:t>
+            </a:r>
+            <a:endParaRPr lang="en-US" sz="6900" dirty="0"/>
           </a:p>
         </p:txBody>
       </p:sp>
@@ -15094,7 +15061,7 @@
               <a:buNone/>
             </a:pPr>
             <a:r>
-              <a:rPr lang="en-US" sz="6300" dirty="0" spc="-23" kern="0">
+              <a:rPr lang="en-US" sz="6900" dirty="0" spc="-20" kern="0">
                 <a:solidFill>
                   <a:srgbClr val="14161C"/>
                 </a:solidFill>
@@ -15105,7 +15072,7 @@
               <a:t>Redis</a:t>
             </a:r>
             <a:r>
-              <a:rPr lang="en-US" sz="6300" dirty="0" spc="0" kern="0">
+              <a:rPr lang="en-US" sz="6900" dirty="0" spc="-1" kern="0">
                 <a:solidFill>
                   <a:srgbClr val="14161C"/>
                 </a:solidFill>
@@ -15116,7 +15083,7 @@
               <a:t> cho</a:t>
             </a:r>
             <a:r>
-              <a:rPr lang="en-US" sz="6300" dirty="0" spc="1" kern="0">
+              <a:rPr lang="en-US" sz="6900" dirty="0" spc="0" kern="0">
                 <a:solidFill>
                   <a:srgbClr val="14161C"/>
                 </a:solidFill>
@@ -15124,10 +15091,10 @@
                 <a:ea typeface="Bricolage Grotesque ExtraBold" pitchFamily="34" charset="-122"/>
                 <a:cs typeface="Bricolage Grotesque ExtraBold" pitchFamily="34" charset="-120"/>
               </a:rPr>
-              <a:t> thấy cả</a:t>
-            </a:r>
-            <a:r>
-              <a:rPr lang="en-US" sz="6300" dirty="0" spc="2" kern="0">
+              <a:t> thấy</a:t>
+            </a:r>
+            <a:r>
+              <a:rPr lang="en-US" sz="6900" dirty="0" spc="-1" kern="0">
                 <a:solidFill>
                   <a:srgbClr val="14161C"/>
                 </a:solidFill>
@@ -15135,10 +15102,10 @@
                 <a:ea typeface="Bricolage Grotesque ExtraBold" pitchFamily="34" charset="-122"/>
                 <a:cs typeface="Bricolage Grotesque ExtraBold" pitchFamily="34" charset="-120"/>
               </a:rPr>
-              <a:t> hai</a:t>
-            </a:r>
-            <a:r>
-              <a:rPr lang="en-US" sz="6300" dirty="0" spc="0" kern="0">
+              <a:t> cả</a:t>
+            </a:r>
+            <a:r>
+              <a:rPr lang="en-US" sz="6900" dirty="0" spc="2" kern="0">
                 <a:solidFill>
                   <a:srgbClr val="14161C"/>
                 </a:solidFill>
@@ -15146,9 +15113,20 @@
                 <a:ea typeface="Bricolage Grotesque ExtraBold" pitchFamily="34" charset="-122"/>
                 <a:cs typeface="Bricolage Grotesque ExtraBold" pitchFamily="34" charset="-120"/>
               </a:rPr>
+              <a:t> hai</a:t>
+            </a:r>
+            <a:r>
+              <a:rPr lang="en-US" sz="6900" dirty="0" spc="-1" kern="0">
+                <a:solidFill>
+                  <a:srgbClr val="14161C"/>
+                </a:solidFill>
+                <a:latin typeface="Bricolage Grotesque ExtraBold" pitchFamily="34" charset="0"/>
+                <a:ea typeface="Bricolage Grotesque ExtraBold" pitchFamily="34" charset="-122"/>
+                <a:cs typeface="Bricolage Grotesque ExtraBold" pitchFamily="34" charset="-120"/>
+              </a:rPr>
               <a:t> cách</a:t>
             </a:r>
-            <a:endParaRPr lang="en-US" sz="6300" dirty="0"/>
+            <a:endParaRPr lang="en-US" sz="6900" dirty="0"/>
           </a:p>
         </p:txBody>
       </p:sp>
